--- a/marketing/partnership/Petrocertif-Pilot-Presentation.pptx
+++ b/marketing/partnership/Petrocertif-Pilot-Presentation.pptx
@@ -4907,7 +4907,7 @@
       <p:grpSpPr/>
       <p:pic>
         <p:nvPicPr>
-          <p:cNvPr id="2" name="Picture 1" descr="deck-dark.jpg"/>
+          <p:cNvPr id="2" name="Picture 1" descr="deck-title.jpg"/>
           <p:cNvPicPr>
             <a:picLocks noChangeAspect="1"/>
           </p:cNvPicPr>
@@ -5000,45 +5000,6 @@
                 <a:latin typeface="Arial"/>
               </a:rPr>
               <a:t>Professional English for supervisors in industrial and energy projects</a:t>
-            </a:r>
-          </a:p>
-        </p:txBody>
-      </p:sp>
-      <p:sp>
-        <p:nvSpPr>
-          <p:cNvPr id="4" name="TextBox 3"/>
-          <p:cNvSpPr txBox="1"/>
-          <p:nvPr/>
-        </p:nvSpPr>
-        <p:spPr>
-          <a:xfrm>
-            <a:off x="786384" y="6327648"/>
-            <a:ext cx="10607040" cy="274320"/>
-          </a:xfrm>
-          <a:prstGeom prst="rect">
-            <a:avLst/>
-          </a:prstGeom>
-          <a:noFill/>
-        </p:spPr>
-        <p:txBody>
-          <a:bodyPr wrap="square" lIns="0" rIns="0" tIns="0" bIns="0">
-            <a:spAutoFit/>
-          </a:bodyPr>
-          <a:lstStyle/>
-          <a:p>
-            <a:pPr algn="l">
-              <a:spcAft>
-                <a:spcPts val="0"/>
-              </a:spcAft>
-            </a:pPr>
-            <a:r>
-              <a:rPr sz="950" b="0" i="0">
-                <a:solidFill>
-                  <a:srgbClr val="CBC3F5"/>
-                </a:solidFill>
-                <a:latin typeface="Arial"/>
-              </a:rPr>
-              <a:t>Lomonec LLC  ·  BE Mastery  ·  app.lomonec.com</a:t>
             </a:r>
           </a:p>
         </p:txBody>
@@ -5846,8 +5807,8 @@
         </p:nvSpPr>
         <p:spPr>
           <a:xfrm>
-            <a:off x="786384" y="6327648"/>
-            <a:ext cx="10607040" cy="274320"/>
+            <a:off x="7315200" y="6382512"/>
+            <a:ext cx="4087368" cy="274320"/>
           </a:xfrm>
           <a:prstGeom prst="rect">
             <a:avLst/>
@@ -5860,7 +5821,7 @@
           </a:bodyPr>
           <a:lstStyle/>
           <a:p>
-            <a:pPr algn="l">
+            <a:pPr algn="r">
               <a:spcAft>
                 <a:spcPts val="0"/>
               </a:spcAft>
@@ -5872,7 +5833,7 @@
                 </a:solidFill>
                 <a:latin typeface="Arial"/>
               </a:rPr>
-              <a:t>Lomonec LLC  ·  BE Mastery  ·  app.lomonec.com</a:t>
+              <a:t>app.lomonec.com  ·  contact@lomonec.com</a:t>
             </a:r>
           </a:p>
         </p:txBody>
@@ -6531,8 +6492,8 @@
         </p:nvSpPr>
         <p:spPr>
           <a:xfrm>
-            <a:off x="786384" y="6327648"/>
-            <a:ext cx="10607040" cy="274320"/>
+            <a:off x="7315200" y="6382512"/>
+            <a:ext cx="4087368" cy="274320"/>
           </a:xfrm>
           <a:prstGeom prst="rect">
             <a:avLst/>
@@ -6545,7 +6506,7 @@
           </a:bodyPr>
           <a:lstStyle/>
           <a:p>
-            <a:pPr algn="l">
+            <a:pPr algn="r">
               <a:spcAft>
                 <a:spcPts val="0"/>
               </a:spcAft>
@@ -6557,7 +6518,7 @@
                 </a:solidFill>
                 <a:latin typeface="Arial"/>
               </a:rPr>
-              <a:t>Lomonec LLC  ·  BE Mastery  ·  app.lomonec.com</a:t>
+              <a:t>app.lomonec.com  ·  contact@lomonec.com</a:t>
             </a:r>
           </a:p>
         </p:txBody>
@@ -7463,8 +7424,8 @@
         </p:nvSpPr>
         <p:spPr>
           <a:xfrm>
-            <a:off x="786384" y="6327648"/>
-            <a:ext cx="10607040" cy="274320"/>
+            <a:off x="7315200" y="6382512"/>
+            <a:ext cx="4087368" cy="274320"/>
           </a:xfrm>
           <a:prstGeom prst="rect">
             <a:avLst/>
@@ -7477,7 +7438,7 @@
           </a:bodyPr>
           <a:lstStyle/>
           <a:p>
-            <a:pPr algn="l">
+            <a:pPr algn="r">
               <a:spcAft>
                 <a:spcPts val="0"/>
               </a:spcAft>
@@ -7489,7 +7450,7 @@
                 </a:solidFill>
                 <a:latin typeface="Arial"/>
               </a:rPr>
-              <a:t>Lomonec LLC  ·  BE Mastery  ·  app.lomonec.com</a:t>
+              <a:t>app.lomonec.com  ·  contact@lomonec.com</a:t>
             </a:r>
           </a:p>
         </p:txBody>
@@ -8392,8 +8353,8 @@
         </p:nvSpPr>
         <p:spPr>
           <a:xfrm>
-            <a:off x="786384" y="6327648"/>
-            <a:ext cx="10607040" cy="274320"/>
+            <a:off x="7315200" y="6382512"/>
+            <a:ext cx="4087368" cy="274320"/>
           </a:xfrm>
           <a:prstGeom prst="rect">
             <a:avLst/>
@@ -8406,7 +8367,7 @@
           </a:bodyPr>
           <a:lstStyle/>
           <a:p>
-            <a:pPr algn="l">
+            <a:pPr algn="r">
               <a:spcAft>
                 <a:spcPts val="0"/>
               </a:spcAft>
@@ -8418,7 +8379,7 @@
                 </a:solidFill>
                 <a:latin typeface="Arial"/>
               </a:rPr>
-              <a:t>Lomonec LLC  ·  BE Mastery  ·  app.lomonec.com</a:t>
+              <a:t>app.lomonec.com  ·  contact@lomonec.com</a:t>
             </a:r>
           </a:p>
         </p:txBody>
@@ -9282,8 +9243,8 @@
         </p:nvSpPr>
         <p:spPr>
           <a:xfrm>
-            <a:off x="786384" y="6327648"/>
-            <a:ext cx="10607040" cy="274320"/>
+            <a:off x="7315200" y="6382512"/>
+            <a:ext cx="4087368" cy="274320"/>
           </a:xfrm>
           <a:prstGeom prst="rect">
             <a:avLst/>
@@ -9296,7 +9257,7 @@
           </a:bodyPr>
           <a:lstStyle/>
           <a:p>
-            <a:pPr algn="l">
+            <a:pPr algn="r">
               <a:spcAft>
                 <a:spcPts val="0"/>
               </a:spcAft>
@@ -9308,7 +9269,7 @@
                 </a:solidFill>
                 <a:latin typeface="Arial"/>
               </a:rPr>
-              <a:t>Lomonec LLC  ·  BE Mastery  ·  app.lomonec.com</a:t>
+              <a:t>app.lomonec.com  ·  contact@lomonec.com</a:t>
             </a:r>
           </a:p>
         </p:txBody>
@@ -10360,8 +10321,8 @@
         </p:nvSpPr>
         <p:spPr>
           <a:xfrm>
-            <a:off x="786384" y="6327648"/>
-            <a:ext cx="10607040" cy="274320"/>
+            <a:off x="7315200" y="6382512"/>
+            <a:ext cx="4087368" cy="274320"/>
           </a:xfrm>
           <a:prstGeom prst="rect">
             <a:avLst/>
@@ -10374,7 +10335,7 @@
           </a:bodyPr>
           <a:lstStyle/>
           <a:p>
-            <a:pPr algn="l">
+            <a:pPr algn="r">
               <a:spcAft>
                 <a:spcPts val="0"/>
               </a:spcAft>
@@ -10386,7 +10347,7 @@
                 </a:solidFill>
                 <a:latin typeface="Arial"/>
               </a:rPr>
-              <a:t>Lomonec LLC  ·  BE Mastery  ·  app.lomonec.com</a:t>
+              <a:t>app.lomonec.com  ·  contact@lomonec.com</a:t>
             </a:r>
           </a:p>
         </p:txBody>
@@ -10893,7 +10854,7 @@
         </p:nvSpPr>
         <p:spPr>
           <a:xfrm>
-            <a:off x="786384" y="6144768"/>
+            <a:off x="786384" y="5943600"/>
             <a:ext cx="10607040" cy="457200"/>
           </a:xfrm>
           <a:prstGeom prst="rect">
@@ -10932,8 +10893,8 @@
         </p:nvSpPr>
         <p:spPr>
           <a:xfrm>
-            <a:off x="786384" y="6327648"/>
-            <a:ext cx="10607040" cy="274320"/>
+            <a:off x="7315200" y="6382512"/>
+            <a:ext cx="4087368" cy="274320"/>
           </a:xfrm>
           <a:prstGeom prst="rect">
             <a:avLst/>
@@ -10946,7 +10907,7 @@
           </a:bodyPr>
           <a:lstStyle/>
           <a:p>
-            <a:pPr algn="l">
+            <a:pPr algn="r">
               <a:spcAft>
                 <a:spcPts val="0"/>
               </a:spcAft>
@@ -10958,7 +10919,7 @@
                 </a:solidFill>
                 <a:latin typeface="Arial"/>
               </a:rPr>
-              <a:t>Lomonec LLC  ·  BE Mastery  ·  app.lomonec.com</a:t>
+              <a:t>app.lomonec.com  ·  contact@lomonec.com</a:t>
             </a:r>
           </a:p>
         </p:txBody>
@@ -11738,8 +11699,8 @@
         </p:nvSpPr>
         <p:spPr>
           <a:xfrm>
-            <a:off x="786384" y="6327648"/>
-            <a:ext cx="10607040" cy="274320"/>
+            <a:off x="7315200" y="6382512"/>
+            <a:ext cx="4087368" cy="274320"/>
           </a:xfrm>
           <a:prstGeom prst="rect">
             <a:avLst/>
@@ -11752,7 +11713,7 @@
           </a:bodyPr>
           <a:lstStyle/>
           <a:p>
-            <a:pPr algn="l">
+            <a:pPr algn="r">
               <a:spcAft>
                 <a:spcPts val="0"/>
               </a:spcAft>
@@ -11764,7 +11725,7 @@
                 </a:solidFill>
                 <a:latin typeface="Arial"/>
               </a:rPr>
-              <a:t>Lomonec LLC  ·  BE Mastery  ·  app.lomonec.com</a:t>
+              <a:t>app.lomonec.com  ·  contact@lomonec.com</a:t>
             </a:r>
           </a:p>
         </p:txBody>
@@ -12538,8 +12499,8 @@
         </p:nvSpPr>
         <p:spPr>
           <a:xfrm>
-            <a:off x="786384" y="6327648"/>
-            <a:ext cx="10607040" cy="274320"/>
+            <a:off x="7315200" y="6382512"/>
+            <a:ext cx="4087368" cy="274320"/>
           </a:xfrm>
           <a:prstGeom prst="rect">
             <a:avLst/>
@@ -12552,7 +12513,7 @@
           </a:bodyPr>
           <a:lstStyle/>
           <a:p>
-            <a:pPr algn="l">
+            <a:pPr algn="r">
               <a:spcAft>
                 <a:spcPts val="0"/>
               </a:spcAft>
@@ -12564,7 +12525,7 @@
                 </a:solidFill>
                 <a:latin typeface="Arial"/>
               </a:rPr>
-              <a:t>Lomonec LLC  ·  BE Mastery  ·  app.lomonec.com</a:t>
+              <a:t>app.lomonec.com  ·  contact@lomonec.com</a:t>
             </a:r>
           </a:p>
         </p:txBody>
@@ -12715,8 +12676,8 @@
         </p:nvSpPr>
         <p:spPr>
           <a:xfrm>
-            <a:off x="786384" y="6327648"/>
-            <a:ext cx="10607040" cy="274320"/>
+            <a:off x="7315200" y="6382512"/>
+            <a:ext cx="4087368" cy="274320"/>
           </a:xfrm>
           <a:prstGeom prst="rect">
             <a:avLst/>
@@ -12729,7 +12690,7 @@
           </a:bodyPr>
           <a:lstStyle/>
           <a:p>
-            <a:pPr algn="l">
+            <a:pPr algn="r">
               <a:spcAft>
                 <a:spcPts val="0"/>
               </a:spcAft>
@@ -12741,7 +12702,7 @@
                 </a:solidFill>
                 <a:latin typeface="Arial"/>
               </a:rPr>
-              <a:t>Lomonec LLC  ·  BE Mastery  ·  app.lomonec.com</a:t>
+              <a:t>app.lomonec.com  ·  contact@lomonec.com</a:t>
             </a:r>
           </a:p>
         </p:txBody>
@@ -13085,8 +13046,8 @@
         </p:nvSpPr>
         <p:spPr>
           <a:xfrm>
-            <a:off x="786384" y="6327648"/>
-            <a:ext cx="10607040" cy="274320"/>
+            <a:off x="7315200" y="6382512"/>
+            <a:ext cx="4087368" cy="274320"/>
           </a:xfrm>
           <a:prstGeom prst="rect">
             <a:avLst/>
@@ -13099,7 +13060,7 @@
           </a:bodyPr>
           <a:lstStyle/>
           <a:p>
-            <a:pPr algn="l">
+            <a:pPr algn="r">
               <a:spcAft>
                 <a:spcPts val="0"/>
               </a:spcAft>
@@ -13111,7 +13072,7 @@
                 </a:solidFill>
                 <a:latin typeface="Arial"/>
               </a:rPr>
-              <a:t>Lomonec LLC  ·  BE Mastery  ·  app.lomonec.com</a:t>
+              <a:t>app.lomonec.com  ·  contact@lomonec.com</a:t>
             </a:r>
           </a:p>
         </p:txBody>
@@ -13623,8 +13584,8 @@
         </p:blipFill>
         <p:spPr>
           <a:xfrm>
-            <a:off x="7635240" y="658368"/>
-            <a:ext cx="2906202" cy="5486400"/>
+            <a:off x="7635240" y="969264"/>
+            <a:ext cx="2712455" cy="5120640"/>
           </a:xfrm>
           <a:prstGeom prst="rect">
             <a:avLst/>
@@ -13639,8 +13600,8 @@
         </p:nvSpPr>
         <p:spPr>
           <a:xfrm>
-            <a:off x="786384" y="6327648"/>
-            <a:ext cx="10607040" cy="274320"/>
+            <a:off x="7315200" y="6382512"/>
+            <a:ext cx="4087368" cy="274320"/>
           </a:xfrm>
           <a:prstGeom prst="rect">
             <a:avLst/>
@@ -13653,7 +13614,7 @@
           </a:bodyPr>
           <a:lstStyle/>
           <a:p>
-            <a:pPr algn="l">
+            <a:pPr algn="r">
               <a:spcAft>
                 <a:spcPts val="0"/>
               </a:spcAft>
@@ -13665,7 +13626,7 @@
                 </a:solidFill>
                 <a:latin typeface="Arial"/>
               </a:rPr>
-              <a:t>Lomonec LLC  ·  BE Mastery  ·  app.lomonec.com</a:t>
+              <a:t>app.lomonec.com  ·  contact@lomonec.com</a:t>
             </a:r>
           </a:p>
         </p:txBody>
@@ -14177,8 +14138,8 @@
         </p:blipFill>
         <p:spPr>
           <a:xfrm>
-            <a:off x="7635240" y="658368"/>
-            <a:ext cx="2906202" cy="5486400"/>
+            <a:off x="7635240" y="969264"/>
+            <a:ext cx="2712455" cy="5120640"/>
           </a:xfrm>
           <a:prstGeom prst="rect">
             <a:avLst/>
@@ -14193,8 +14154,8 @@
         </p:nvSpPr>
         <p:spPr>
           <a:xfrm>
-            <a:off x="786384" y="6327648"/>
-            <a:ext cx="10607040" cy="274320"/>
+            <a:off x="7315200" y="6382512"/>
+            <a:ext cx="4087368" cy="274320"/>
           </a:xfrm>
           <a:prstGeom prst="rect">
             <a:avLst/>
@@ -14207,7 +14168,7 @@
           </a:bodyPr>
           <a:lstStyle/>
           <a:p>
-            <a:pPr algn="l">
+            <a:pPr algn="r">
               <a:spcAft>
                 <a:spcPts val="0"/>
               </a:spcAft>
@@ -14219,7 +14180,7 @@
                 </a:solidFill>
                 <a:latin typeface="Arial"/>
               </a:rPr>
-              <a:t>Lomonec LLC  ·  BE Mastery  ·  app.lomonec.com</a:t>
+              <a:t>app.lomonec.com  ·  contact@lomonec.com</a:t>
             </a:r>
           </a:p>
         </p:txBody>
@@ -14731,8 +14692,8 @@
         </p:blipFill>
         <p:spPr>
           <a:xfrm>
-            <a:off x="7635240" y="658368"/>
-            <a:ext cx="3848431" cy="5486400"/>
+            <a:off x="7635240" y="969264"/>
+            <a:ext cx="3591869" cy="5120640"/>
           </a:xfrm>
           <a:prstGeom prst="rect">
             <a:avLst/>
@@ -14747,8 +14708,8 @@
         </p:nvSpPr>
         <p:spPr>
           <a:xfrm>
-            <a:off x="786384" y="6327648"/>
-            <a:ext cx="10607040" cy="274320"/>
+            <a:off x="7315200" y="6382512"/>
+            <a:ext cx="4087368" cy="274320"/>
           </a:xfrm>
           <a:prstGeom prst="rect">
             <a:avLst/>
@@ -14761,7 +14722,7 @@
           </a:bodyPr>
           <a:lstStyle/>
           <a:p>
-            <a:pPr algn="l">
+            <a:pPr algn="r">
               <a:spcAft>
                 <a:spcPts val="0"/>
               </a:spcAft>
@@ -14773,7 +14734,7 @@
                 </a:solidFill>
                 <a:latin typeface="Arial"/>
               </a:rPr>
-              <a:t>Lomonec LLC  ·  BE Mastery  ·  app.lomonec.com</a:t>
+              <a:t>app.lomonec.com  ·  contact@lomonec.com</a:t>
             </a:r>
           </a:p>
         </p:txBody>
@@ -15285,8 +15246,8 @@
         </p:blipFill>
         <p:spPr>
           <a:xfrm>
-            <a:off x="7635240" y="658368"/>
-            <a:ext cx="2906202" cy="5486400"/>
+            <a:off x="7635240" y="969264"/>
+            <a:ext cx="2712455" cy="5120640"/>
           </a:xfrm>
           <a:prstGeom prst="rect">
             <a:avLst/>
@@ -15301,8 +15262,8 @@
         </p:nvSpPr>
         <p:spPr>
           <a:xfrm>
-            <a:off x="786384" y="6327648"/>
-            <a:ext cx="10607040" cy="274320"/>
+            <a:off x="7315200" y="6382512"/>
+            <a:ext cx="4087368" cy="274320"/>
           </a:xfrm>
           <a:prstGeom prst="rect">
             <a:avLst/>
@@ -15315,7 +15276,7 @@
           </a:bodyPr>
           <a:lstStyle/>
           <a:p>
-            <a:pPr algn="l">
+            <a:pPr algn="r">
               <a:spcAft>
                 <a:spcPts val="0"/>
               </a:spcAft>
@@ -15327,7 +15288,7 @@
                 </a:solidFill>
                 <a:latin typeface="Arial"/>
               </a:rPr>
-              <a:t>Lomonec LLC  ·  BE Mastery  ·  app.lomonec.com</a:t>
+              <a:t>app.lomonec.com  ·  contact@lomonec.com</a:t>
             </a:r>
           </a:p>
         </p:txBody>
@@ -15839,8 +15800,8 @@
         </p:blipFill>
         <p:spPr>
           <a:xfrm>
-            <a:off x="7635240" y="658368"/>
-            <a:ext cx="2906202" cy="5486400"/>
+            <a:off x="7635240" y="969264"/>
+            <a:ext cx="2712455" cy="5120640"/>
           </a:xfrm>
           <a:prstGeom prst="rect">
             <a:avLst/>
@@ -15855,8 +15816,8 @@
         </p:nvSpPr>
         <p:spPr>
           <a:xfrm>
-            <a:off x="786384" y="6327648"/>
-            <a:ext cx="10607040" cy="274320"/>
+            <a:off x="7315200" y="6382512"/>
+            <a:ext cx="4087368" cy="274320"/>
           </a:xfrm>
           <a:prstGeom prst="rect">
             <a:avLst/>
@@ -15869,7 +15830,7 @@
           </a:bodyPr>
           <a:lstStyle/>
           <a:p>
-            <a:pPr algn="l">
+            <a:pPr algn="r">
               <a:spcAft>
                 <a:spcPts val="0"/>
               </a:spcAft>
@@ -15881,7 +15842,7 @@
                 </a:solidFill>
                 <a:latin typeface="Arial"/>
               </a:rPr>
-              <a:t>Lomonec LLC  ·  BE Mastery  ·  app.lomonec.com</a:t>
+              <a:t>app.lomonec.com  ·  contact@lomonec.com</a:t>
             </a:r>
           </a:p>
         </p:txBody>

--- a/marketing/partnership/Petrocertif-Pilot-Presentation.pptx
+++ b/marketing/partnership/Petrocertif-Pilot-Presentation.pptx
@@ -847,13 +847,19 @@
           <a:lstStyle/>
           <a:p>
             <a:r>
-              <a:t>He will ask this, so answer it before he does. Be concrete — a training director thinks in contact hours.</a:t>
+              <a:t>He will ask this, so answer it before he does. And lead with the thing his own learners told you.</a:t>
             </a:r>
           </a:p>
           <a:p/>
           <a:p>
             <a:r>
-              <a:t>"Twenty-five minutes a day, in their own time, on their own phone. Not a class, not a timetable. Four things: warm up by shadowing a real speaker, do the day's session, run one workplace conversation, then read the report on what they missed. Roughly ten hours across the four weeks."</a:t>
+              <a:t>"The first feedback from your students was that the app opened above their level. So it now starts with a one-minute check, and anyone not ready begins with Foundations: three sentences a day, French under every line, fifteen days. Then the full programme — twenty-five minutes a day, on their own phone."</a:t>
+            </a:r>
+          </a:p>
+          <a:p/>
+          <a:p>
+            <a:r>
+              <a:t>Say that this was built in a week from their feedback. It is the best evidence you have that you listen.</a:t>
             </a:r>
           </a:p>
           <a:p/>
@@ -7567,13 +7573,13 @@
               </a:spcAft>
             </a:pPr>
             <a:r>
-              <a:rPr sz="2900" b="1" i="0">
+              <a:rPr sz="3100" b="1" i="0">
                 <a:solidFill>
                   <a:srgbClr val="2B1F5E"/>
                 </a:solidFill>
                 <a:latin typeface="Arial"/>
               </a:rPr>
-              <a:t>Twenty-five minutes a day, on their own phone</a:t>
+              <a:t>Two stages, on their own phone</a:t>
             </a:r>
           </a:p>
         </p:txBody>
@@ -7704,7 +7710,7 @@
                 </a:solidFill>
                 <a:latin typeface="Arial"/>
               </a:rPr>
-              <a:t>5 min</a:t>
+              <a:t>Check</a:t>
             </a:r>
           </a:p>
         </p:txBody>
@@ -7746,7 +7752,7 @@
                 </a:solidFill>
                 <a:latin typeface="Arial"/>
               </a:rPr>
-              <a:t>Shadow</a:t>
+              <a:t>One minute, day one</a:t>
             </a:r>
           </a:p>
         </p:txBody>
@@ -7788,7 +7794,7 @@
                 </a:solidFill>
                 <a:latin typeface="Arial"/>
               </a:rPr>
-              <a:t>Loop a short clip of a real speaker and copy the rhythm out loud.</a:t>
+              <a:t>Three sentences: did you understand each one? Honest answers decide where they start — nothing else.</a:t>
             </a:r>
           </a:p>
         </p:txBody>
@@ -7875,7 +7881,7 @@
                 </a:solidFill>
                 <a:latin typeface="Arial"/>
               </a:rPr>
-              <a:t>10 min</a:t>
+              <a:t>Stage 1</a:t>
             </a:r>
           </a:p>
         </p:txBody>
@@ -7917,7 +7923,7 @@
                 </a:solidFill>
                 <a:latin typeface="Arial"/>
               </a:rPr>
-              <a:t>Today's session</a:t>
+              <a:t>Foundations · 15 min a day, weeks 1–2</a:t>
             </a:r>
           </a:p>
         </p:txBody>
@@ -7959,7 +7965,7 @@
                 </a:solidFill>
                 <a:latin typeface="Arial"/>
               </a:rPr>
-              <a:t>The prepared daily session — pronunciation, a speaking drill, or a meeting simulation.</a:t>
+              <a:t>Three sentences a day, French under every line. Hear it, say it, record it. Fifteen days.</a:t>
             </a:r>
           </a:p>
         </p:txBody>
@@ -8046,7 +8052,7 @@
                 </a:solidFill>
                 <a:latin typeface="Arial"/>
               </a:rPr>
-              <a:t>7 min</a:t>
+              <a:t>Stage 2</a:t>
             </a:r>
           </a:p>
         </p:txBody>
@@ -8088,7 +8094,7 @@
                 </a:solidFill>
                 <a:latin typeface="Arial"/>
               </a:rPr>
-              <a:t>One workplace conversation</a:t>
+              <a:t>The full programme · 25 min a day, weeks 3–4</a:t>
             </a:r>
           </a:p>
         </p:txBody>
@@ -8130,7 +8136,7 @@
                 </a:solidFill>
                 <a:latin typeface="Arial"/>
               </a:rPr>
-              <a:t>Speak with the supervisor, the inspector or HR — and answer out loud.</a:t>
+              <a:t>Shadowing, the daily session, one workplace conversation, and the report on what they missed.</a:t>
             </a:r>
           </a:p>
         </p:txBody>
@@ -8217,7 +8223,7 @@
                 </a:solidFill>
                 <a:latin typeface="Arial"/>
               </a:rPr>
-              <a:t>3 min</a:t>
+              <a:t>Weekly</a:t>
             </a:r>
           </a:p>
         </p:txBody>
@@ -8259,7 +8265,7 @@
                 </a:solidFill>
                 <a:latin typeface="Arial"/>
               </a:rPr>
-              <a:t>Read the report</a:t>
+              <a:t>One interview coach</a:t>
             </a:r>
           </a:p>
         </p:txBody>
@@ -8301,7 +8307,7 @@
                 </a:solidFill>
                 <a:latin typeface="Arial"/>
               </a:rPr>
-              <a:t>What was covered, what was missed, and the sentence that would have carried it.</a:t>
+              <a:t>In stage 2 — the activity closest to the interview they are actually preparing for.</a:t>
             </a:r>
           </a:p>
         </p:txBody>
@@ -8340,7 +8346,7 @@
                 </a:solidFill>
                 <a:latin typeface="Arial"/>
               </a:rPr>
-              <a:t>About 10 hours across the four weeks — in their own time, no timetable, no classroom.</a:t>
+              <a:t>Learners who pass the check start stage 2 in week 1. Nobody is left staring at a screen they cannot follow.</a:t>
             </a:r>
           </a:p>
         </p:txBody>
@@ -8496,13 +8502,13 @@
               </a:spcAft>
             </a:pPr>
             <a:r>
-              <a:rPr sz="3200" b="1" i="0">
+              <a:rPr sz="3000" b="1" i="0">
                 <a:solidFill>
                   <a:srgbClr val="2B1F5E"/>
                 </a:solidFill>
                 <a:latin typeface="Arial"/>
               </a:rPr>
-              <a:t>Baseline, practice, measure again</a:t>
+              <a:t>Check, Foundations, conversations, measure</a:t>
             </a:r>
           </a:p>
         </p:txBody>
@@ -8675,7 +8681,7 @@
                 </a:solidFill>
                 <a:latin typeface="Arial"/>
               </a:rPr>
-              <a:t>Set up and baseline</a:t>
+              <a:t>Check and baseline</a:t>
             </a:r>
           </a:p>
         </p:txBody>
@@ -8717,7 +8723,7 @@
                 </a:solidFill>
                 <a:latin typeface="Arial"/>
               </a:rPr>
-              <a:t>Induction, accounts created, and every learner records one answer before any practice. That recording is the before.</a:t>
+              <a:t>Induction, the one-minute check, and every learner records three Foundations sentences before any practice. That is the before.</a:t>
             </a:r>
           </a:p>
         </p:txBody>
@@ -8804,7 +8810,7 @@
                 </a:solidFill>
                 <a:latin typeface="Arial"/>
               </a:rPr>
-              <a:t>WEEKS 2–3</a:t>
+              <a:t>WEEKS 1–2</a:t>
             </a:r>
           </a:p>
         </p:txBody>
@@ -8846,7 +8852,7 @@
                 </a:solidFill>
                 <a:latin typeface="Arial"/>
               </a:rPr>
-              <a:t>Practice</a:t>
+              <a:t>Foundations</a:t>
             </a:r>
           </a:p>
         </p:txBody>
@@ -8888,7 +8894,7 @@
                 </a:solidFill>
                 <a:latin typeface="Arial"/>
               </a:rPr>
-              <a:t>Learners work in their own time. A weekly figure comes to you. I chase nobody through you.</a:t>
+              <a:t>Three sentences a day, fifteen minutes. Learners who passed the check go straight to stage 2.</a:t>
             </a:r>
           </a:p>
         </p:txBody>
@@ -8975,7 +8981,7 @@
                 </a:solidFill>
                 <a:latin typeface="Arial"/>
               </a:rPr>
-              <a:t>WEEK 4</a:t>
+              <a:t>WEEKS 3–4</a:t>
             </a:r>
           </a:p>
         </p:txBody>
@@ -9017,7 +9023,7 @@
                 </a:solidFill>
                 <a:latin typeface="Arial"/>
               </a:rPr>
-              <a:t>Measure again</a:t>
+              <a:t>Conversations</a:t>
             </a:r>
           </a:p>
         </p:txBody>
@@ -9059,7 +9065,7 @@
                 </a:solidFill>
                 <a:latin typeface="Arial"/>
               </a:rPr>
-              <a:t>Interview simulations, the same measurement as week one, plus learner and instructor feedback.</a:t>
+              <a:t>Workplace scenarios and interview coaches. The same scenario recorded in week 3 and again in week 4.</a:t>
             </a:r>
           </a:p>
         </p:txBody>
@@ -9230,7 +9236,7 @@
                 </a:solidFill>
                 <a:latin typeface="Arial"/>
               </a:rPr>
-              <a:t>Written up together. Nothing published without your written approval.</a:t>
+              <a:t>The day-1 sentences re-recorded, learner by learner. Nothing published without your written approval.</a:t>
             </a:r>
           </a:p>
         </p:txBody>
@@ -9392,7 +9398,7 @@
                 </a:solidFill>
                 <a:latin typeface="Arial"/>
               </a:rPr>
-              <a:t>The seven things we report</a:t>
+              <a:t>The eight things we report</a:t>
             </a:r>
           </a:p>
         </p:txBody>
@@ -9449,8 +9455,8 @@
         </p:nvSpPr>
         <p:spPr>
           <a:xfrm>
-            <a:off x="786384" y="2377440"/>
-            <a:ext cx="5120640" cy="786384"/>
+            <a:off x="786384" y="2286000"/>
+            <a:ext cx="5120640" cy="676656"/>
           </a:xfrm>
           <a:prstGeom prst="roundRect">
             <a:avLst>
@@ -9497,8 +9503,8 @@
         </p:nvSpPr>
         <p:spPr>
           <a:xfrm>
-            <a:off x="1060704" y="2514600"/>
-            <a:ext cx="4572000" cy="548640"/>
+            <a:off x="1060704" y="2386584"/>
+            <a:ext cx="4572000" cy="502920"/>
           </a:xfrm>
           <a:prstGeom prst="rect">
             <a:avLst/>
@@ -9513,14 +9519,14 @@
           <a:p>
             <a:pPr algn="l">
               <a:lnSpc>
-                <a:spcPct val="110000"/>
+                <a:spcPct val="108000"/>
               </a:lnSpc>
               <a:spcAft>
-                <a:spcPts val="200"/>
-              </a:spcAft>
-            </a:pPr>
-            <a:r>
-              <a:rPr sz="1400" b="1" i="0">
+                <a:spcPts val="100"/>
+              </a:spcAft>
+            </a:pPr>
+            <a:r>
+              <a:rPr sz="1300" b="1" i="0">
                 <a:solidFill>
                   <a:srgbClr val="2B1F5E"/>
                 </a:solidFill>
@@ -9532,14 +9538,14 @@
           <a:p>
             <a:pPr algn="l">
               <a:lnSpc>
-                <a:spcPct val="115000"/>
+                <a:spcPct val="112000"/>
               </a:lnSpc>
               <a:spcAft>
                 <a:spcPts val="0"/>
               </a:spcAft>
             </a:pPr>
             <a:r>
-              <a:rPr sz="1200" b="0" i="0">
+              <a:rPr sz="1100" b="0" i="0">
                 <a:solidFill>
                   <a:srgbClr val="6B7083"/>
                 </a:solidFill>
@@ -9558,8 +9564,8 @@
         </p:nvSpPr>
         <p:spPr>
           <a:xfrm>
-            <a:off x="6272784" y="2377440"/>
-            <a:ext cx="5120640" cy="786384"/>
+            <a:off x="6272784" y="2286000"/>
+            <a:ext cx="5120640" cy="676656"/>
           </a:xfrm>
           <a:prstGeom prst="roundRect">
             <a:avLst>
@@ -9606,8 +9612,8 @@
         </p:nvSpPr>
         <p:spPr>
           <a:xfrm>
-            <a:off x="6547104" y="2514600"/>
-            <a:ext cx="4572000" cy="548640"/>
+            <a:off x="6547104" y="2386584"/>
+            <a:ext cx="4572000" cy="502920"/>
           </a:xfrm>
           <a:prstGeom prst="rect">
             <a:avLst/>
@@ -9622,14 +9628,14 @@
           <a:p>
             <a:pPr algn="l">
               <a:lnSpc>
-                <a:spcPct val="110000"/>
+                <a:spcPct val="108000"/>
               </a:lnSpc>
               <a:spcAft>
-                <a:spcPts val="200"/>
-              </a:spcAft>
-            </a:pPr>
-            <a:r>
-              <a:rPr sz="1400" b="1" i="0">
+                <a:spcPts val="100"/>
+              </a:spcAft>
+            </a:pPr>
+            <a:r>
+              <a:rPr sz="1300" b="1" i="0">
                 <a:solidFill>
                   <a:srgbClr val="2B1F5E"/>
                 </a:solidFill>
@@ -9641,14 +9647,14 @@
           <a:p>
             <a:pPr algn="l">
               <a:lnSpc>
-                <a:spcPct val="115000"/>
+                <a:spcPct val="112000"/>
               </a:lnSpc>
               <a:spcAft>
                 <a:spcPts val="0"/>
               </a:spcAft>
             </a:pPr>
             <a:r>
-              <a:rPr sz="1200" b="0" i="0">
+              <a:rPr sz="1100" b="0" i="0">
                 <a:solidFill>
                   <a:srgbClr val="6B7083"/>
                 </a:solidFill>
@@ -9667,8 +9673,8 @@
         </p:nvSpPr>
         <p:spPr>
           <a:xfrm>
-            <a:off x="786384" y="3273552"/>
-            <a:ext cx="5120640" cy="786384"/>
+            <a:off x="786384" y="3054096"/>
+            <a:ext cx="5120640" cy="676656"/>
           </a:xfrm>
           <a:prstGeom prst="roundRect">
             <a:avLst>
@@ -9715,8 +9721,8 @@
         </p:nvSpPr>
         <p:spPr>
           <a:xfrm>
-            <a:off x="1060704" y="3410712"/>
-            <a:ext cx="4572000" cy="548640"/>
+            <a:off x="1060704" y="3154680"/>
+            <a:ext cx="4572000" cy="502920"/>
           </a:xfrm>
           <a:prstGeom prst="rect">
             <a:avLst/>
@@ -9731,14 +9737,14 @@
           <a:p>
             <a:pPr algn="l">
               <a:lnSpc>
-                <a:spcPct val="110000"/>
+                <a:spcPct val="108000"/>
               </a:lnSpc>
               <a:spcAft>
-                <a:spcPts val="200"/>
-              </a:spcAft>
-            </a:pPr>
-            <a:r>
-              <a:rPr sz="1400" b="1" i="0">
+                <a:spcPts val="100"/>
+              </a:spcAft>
+            </a:pPr>
+            <a:r>
+              <a:rPr sz="1300" b="1" i="0">
                 <a:solidFill>
                   <a:srgbClr val="2B1F5E"/>
                 </a:solidFill>
@@ -9750,14 +9756,14 @@
           <a:p>
             <a:pPr algn="l">
               <a:lnSpc>
-                <a:spcPct val="115000"/>
+                <a:spcPct val="112000"/>
               </a:lnSpc>
               <a:spcAft>
                 <a:spcPts val="0"/>
               </a:spcAft>
             </a:pPr>
             <a:r>
-              <a:rPr sz="1200" b="0" i="0">
+              <a:rPr sz="1100" b="0" i="0">
                 <a:solidFill>
                   <a:srgbClr val="6B7083"/>
                 </a:solidFill>
@@ -9776,8 +9782,8 @@
         </p:nvSpPr>
         <p:spPr>
           <a:xfrm>
-            <a:off x="6272784" y="3273552"/>
-            <a:ext cx="5120640" cy="786384"/>
+            <a:off x="6272784" y="3054096"/>
+            <a:ext cx="5120640" cy="676656"/>
           </a:xfrm>
           <a:prstGeom prst="roundRect">
             <a:avLst>
@@ -9824,8 +9830,8 @@
         </p:nvSpPr>
         <p:spPr>
           <a:xfrm>
-            <a:off x="6547104" y="3410712"/>
-            <a:ext cx="4572000" cy="548640"/>
+            <a:off x="6547104" y="3154680"/>
+            <a:ext cx="4572000" cy="502920"/>
           </a:xfrm>
           <a:prstGeom prst="rect">
             <a:avLst/>
@@ -9840,14 +9846,14 @@
           <a:p>
             <a:pPr algn="l">
               <a:lnSpc>
-                <a:spcPct val="110000"/>
+                <a:spcPct val="108000"/>
               </a:lnSpc>
               <a:spcAft>
-                <a:spcPts val="200"/>
-              </a:spcAft>
-            </a:pPr>
-            <a:r>
-              <a:rPr sz="1400" b="1" i="0">
+                <a:spcPts val="100"/>
+              </a:spcAft>
+            </a:pPr>
+            <a:r>
+              <a:rPr sz="1300" b="1" i="0">
                 <a:solidFill>
                   <a:srgbClr val="2B1F5E"/>
                 </a:solidFill>
@@ -9859,14 +9865,14 @@
           <a:p>
             <a:pPr algn="l">
               <a:lnSpc>
-                <a:spcPct val="115000"/>
+                <a:spcPct val="112000"/>
               </a:lnSpc>
               <a:spcAft>
                 <a:spcPts val="0"/>
               </a:spcAft>
             </a:pPr>
             <a:r>
-              <a:rPr sz="1200" b="0" i="0">
+              <a:rPr sz="1100" b="0" i="0">
                 <a:solidFill>
                   <a:srgbClr val="6B7083"/>
                 </a:solidFill>
@@ -9885,8 +9891,8 @@
         </p:nvSpPr>
         <p:spPr>
           <a:xfrm>
-            <a:off x="786384" y="4169664"/>
-            <a:ext cx="5120640" cy="786384"/>
+            <a:off x="786384" y="3822192"/>
+            <a:ext cx="5120640" cy="676656"/>
           </a:xfrm>
           <a:prstGeom prst="roundRect">
             <a:avLst>
@@ -9933,8 +9939,8 @@
         </p:nvSpPr>
         <p:spPr>
           <a:xfrm>
-            <a:off x="1060704" y="4306824"/>
-            <a:ext cx="4572000" cy="548640"/>
+            <a:off x="1060704" y="3922776"/>
+            <a:ext cx="4572000" cy="502920"/>
           </a:xfrm>
           <a:prstGeom prst="rect">
             <a:avLst/>
@@ -9949,14 +9955,14 @@
           <a:p>
             <a:pPr algn="l">
               <a:lnSpc>
-                <a:spcPct val="110000"/>
+                <a:spcPct val="108000"/>
               </a:lnSpc>
               <a:spcAft>
-                <a:spcPts val="200"/>
-              </a:spcAft>
-            </a:pPr>
-            <a:r>
-              <a:rPr sz="1400" b="1" i="0">
+                <a:spcPts val="100"/>
+              </a:spcAft>
+            </a:pPr>
+            <a:r>
+              <a:rPr sz="1300" b="1" i="0">
                 <a:solidFill>
                   <a:srgbClr val="2B1F5E"/>
                 </a:solidFill>
@@ -9968,14 +9974,14 @@
           <a:p>
             <a:pPr algn="l">
               <a:lnSpc>
-                <a:spcPct val="115000"/>
+                <a:spcPct val="112000"/>
               </a:lnSpc>
               <a:spcAft>
                 <a:spcPts val="0"/>
               </a:spcAft>
             </a:pPr>
             <a:r>
-              <a:rPr sz="1200" b="0" i="0">
+              <a:rPr sz="1100" b="0" i="0">
                 <a:solidFill>
                   <a:srgbClr val="6B7083"/>
                 </a:solidFill>
@@ -9994,8 +10000,8 @@
         </p:nvSpPr>
         <p:spPr>
           <a:xfrm>
-            <a:off x="6272784" y="4169664"/>
-            <a:ext cx="5120640" cy="786384"/>
+            <a:off x="6272784" y="3822192"/>
+            <a:ext cx="5120640" cy="676656"/>
           </a:xfrm>
           <a:prstGeom prst="roundRect">
             <a:avLst>
@@ -10042,8 +10048,8 @@
         </p:nvSpPr>
         <p:spPr>
           <a:xfrm>
-            <a:off x="6547104" y="4306824"/>
-            <a:ext cx="4572000" cy="548640"/>
+            <a:off x="6547104" y="3922776"/>
+            <a:ext cx="4572000" cy="502920"/>
           </a:xfrm>
           <a:prstGeom prst="rect">
             <a:avLst/>
@@ -10058,39 +10064,39 @@
           <a:p>
             <a:pPr algn="l">
               <a:lnSpc>
-                <a:spcPct val="110000"/>
+                <a:spcPct val="108000"/>
               </a:lnSpc>
               <a:spcAft>
-                <a:spcPts val="200"/>
-              </a:spcAft>
-            </a:pPr>
-            <a:r>
-              <a:rPr sz="1400" b="1" i="0">
+                <a:spcPts val="100"/>
+              </a:spcAft>
+            </a:pPr>
+            <a:r>
+              <a:rPr sz="1300" b="1" i="0">
                 <a:solidFill>
                   <a:srgbClr val="2B1F5E"/>
                 </a:solidFill>
                 <a:latin typeface="Arial"/>
               </a:rPr>
-              <a:t>Coverage change</a:t>
+              <a:t>Progress through Foundations</a:t>
             </a:r>
           </a:p>
           <a:p>
             <a:pPr algn="l">
               <a:lnSpc>
-                <a:spcPct val="115000"/>
+                <a:spcPct val="112000"/>
               </a:lnSpc>
               <a:spcAft>
                 <a:spcPts val="0"/>
               </a:spcAft>
             </a:pPr>
             <a:r>
-              <a:rPr sz="1200" b="0" i="0">
+              <a:rPr sz="1100" b="0" i="0">
                 <a:solidFill>
                   <a:srgbClr val="6B7083"/>
                 </a:solidFill>
                 <a:latin typeface="Arial"/>
               </a:rPr>
-              <a:t>first recorded answer against last</a:t>
+              <a:t>days completed; who reached stage 2</a:t>
             </a:r>
           </a:p>
         </p:txBody>
@@ -10103,8 +10109,8 @@
         </p:nvSpPr>
         <p:spPr>
           <a:xfrm>
-            <a:off x="786384" y="5065776"/>
-            <a:ext cx="5120640" cy="786384"/>
+            <a:off x="786384" y="4590288"/>
+            <a:ext cx="5120640" cy="676656"/>
           </a:xfrm>
           <a:prstGeom prst="roundRect">
             <a:avLst>
@@ -10151,8 +10157,8 @@
         </p:nvSpPr>
         <p:spPr>
           <a:xfrm>
-            <a:off x="1060704" y="5202936"/>
-            <a:ext cx="4572000" cy="548640"/>
+            <a:off x="1060704" y="4690872"/>
+            <a:ext cx="4572000" cy="502920"/>
           </a:xfrm>
           <a:prstGeom prst="rect">
             <a:avLst/>
@@ -10167,39 +10173,39 @@
           <a:p>
             <a:pPr algn="l">
               <a:lnSpc>
-                <a:spcPct val="110000"/>
+                <a:spcPct val="108000"/>
               </a:lnSpc>
               <a:spcAft>
-                <a:spcPts val="200"/>
-              </a:spcAft>
-            </a:pPr>
-            <a:r>
-              <a:rPr sz="1400" b="1" i="0">
+                <a:spcPts val="100"/>
+              </a:spcAft>
+            </a:pPr>
+            <a:r>
+              <a:rPr sz="1300" b="1" i="0">
                 <a:solidFill>
                   <a:srgbClr val="2B1F5E"/>
                 </a:solidFill>
                 <a:latin typeface="Arial"/>
               </a:rPr>
-              <a:t>Instructor observations</a:t>
+              <a:t>Coverage change</a:t>
             </a:r>
           </a:p>
           <a:p>
             <a:pPr algn="l">
               <a:lnSpc>
-                <a:spcPct val="115000"/>
+                <a:spcPct val="112000"/>
               </a:lnSpc>
               <a:spcAft>
                 <a:spcPts val="0"/>
               </a:spcAft>
             </a:pPr>
             <a:r>
-              <a:rPr sz="1200" b="0" i="0">
+              <a:rPr sz="1100" b="0" i="0">
                 <a:solidFill>
                   <a:srgbClr val="6B7083"/>
                 </a:solidFill>
                 <a:latin typeface="Arial"/>
               </a:rPr>
-              <a:t>what your staff notice in class</a:t>
+              <a:t>first recording against last, per learner</a:t>
             </a:r>
           </a:p>
         </p:txBody>
@@ -10212,8 +10218,117 @@
         </p:nvSpPr>
         <p:spPr>
           <a:xfrm>
-            <a:off x="6272784" y="5065776"/>
-            <a:ext cx="5120640" cy="786384"/>
+            <a:off x="6272784" y="4590288"/>
+            <a:ext cx="5120640" cy="676656"/>
+          </a:xfrm>
+          <a:prstGeom prst="roundRect">
+            <a:avLst>
+              <a:gd name="adj" fmla="val 6000"/>
+            </a:avLst>
+          </a:prstGeom>
+          <a:solidFill>
+            <a:srgbClr val="F6F5FD"/>
+          </a:solidFill>
+          <a:ln w="12700">
+            <a:solidFill>
+              <a:srgbClr val="DDD9F5"/>
+            </a:solidFill>
+          </a:ln>
+          <a:effectLst/>
+        </p:spPr>
+        <p:style>
+          <a:lnRef idx="1">
+            <a:schemeClr val="accent1"/>
+          </a:lnRef>
+          <a:fillRef idx="3">
+            <a:schemeClr val="accent1"/>
+          </a:fillRef>
+          <a:effectRef idx="2">
+            <a:schemeClr val="accent1"/>
+          </a:effectRef>
+          <a:fontRef idx="minor">
+            <a:schemeClr val="lt1"/>
+          </a:fontRef>
+        </p:style>
+        <p:txBody>
+          <a:bodyPr rtlCol="0" anchor="ctr"/>
+          <a:lstStyle/>
+          <a:p>
+            <a:pPr algn="ctr"/>
+          </a:p>
+        </p:txBody>
+      </p:sp>
+      <p:sp>
+        <p:nvSpPr>
+          <p:cNvPr id="21" name="TextBox 20"/>
+          <p:cNvSpPr txBox="1"/>
+          <p:nvPr/>
+        </p:nvSpPr>
+        <p:spPr>
+          <a:xfrm>
+            <a:off x="6547104" y="4690872"/>
+            <a:ext cx="4572000" cy="502920"/>
+          </a:xfrm>
+          <a:prstGeom prst="rect">
+            <a:avLst/>
+          </a:prstGeom>
+          <a:noFill/>
+        </p:spPr>
+        <p:txBody>
+          <a:bodyPr wrap="square" lIns="0" rIns="0" tIns="0" bIns="0">
+            <a:spAutoFit/>
+          </a:bodyPr>
+          <a:lstStyle/>
+          <a:p>
+            <a:pPr algn="l">
+              <a:lnSpc>
+                <a:spcPct val="108000"/>
+              </a:lnSpc>
+              <a:spcAft>
+                <a:spcPts val="100"/>
+              </a:spcAft>
+            </a:pPr>
+            <a:r>
+              <a:rPr sz="1300" b="1" i="0">
+                <a:solidFill>
+                  <a:srgbClr val="2B1F5E"/>
+                </a:solidFill>
+                <a:latin typeface="Arial"/>
+              </a:rPr>
+              <a:t>Instructor observations</a:t>
+            </a:r>
+          </a:p>
+          <a:p>
+            <a:pPr algn="l">
+              <a:lnSpc>
+                <a:spcPct val="112000"/>
+              </a:lnSpc>
+              <a:spcAft>
+                <a:spcPts val="0"/>
+              </a:spcAft>
+            </a:pPr>
+            <a:r>
+              <a:rPr sz="1100" b="0" i="0">
+                <a:solidFill>
+                  <a:srgbClr val="6B7083"/>
+                </a:solidFill>
+                <a:latin typeface="Arial"/>
+              </a:rPr>
+              <a:t>what your staff notice in class</a:t>
+            </a:r>
+          </a:p>
+        </p:txBody>
+      </p:sp>
+      <p:sp>
+        <p:nvSpPr>
+          <p:cNvPr id="22" name="Rounded Rectangle 21"/>
+          <p:cNvSpPr/>
+          <p:nvPr/>
+        </p:nvSpPr>
+        <p:spPr>
+          <a:xfrm>
+            <a:off x="786384" y="5358384"/>
+            <a:ext cx="5120640" cy="676656"/>
           </a:xfrm>
           <a:prstGeom prst="roundRect">
             <a:avLst>
@@ -10254,14 +10369,14 @@
       </p:sp>
       <p:sp>
         <p:nvSpPr>
-          <p:cNvPr id="21" name="TextBox 20"/>
+          <p:cNvPr id="23" name="TextBox 22"/>
           <p:cNvSpPr txBox="1"/>
           <p:nvPr/>
         </p:nvSpPr>
         <p:spPr>
           <a:xfrm>
-            <a:off x="6547104" y="5202936"/>
-            <a:ext cx="4572000" cy="548640"/>
+            <a:off x="1060704" y="5458968"/>
+            <a:ext cx="4572000" cy="502920"/>
           </a:xfrm>
           <a:prstGeom prst="rect">
             <a:avLst/>
@@ -10276,33 +10391,33 @@
           <a:p>
             <a:pPr algn="l">
               <a:lnSpc>
-                <a:spcPct val="110000"/>
+                <a:spcPct val="108000"/>
               </a:lnSpc>
               <a:spcAft>
-                <a:spcPts val="200"/>
-              </a:spcAft>
-            </a:pPr>
-            <a:r>
-              <a:rPr sz="1400" b="1" i="0">
+                <a:spcPts val="100"/>
+              </a:spcAft>
+            </a:pPr>
+            <a:r>
+              <a:rPr sz="1300" b="1" i="0">
                 <a:solidFill>
                   <a:srgbClr val="1D6B46"/>
                 </a:solidFill>
                 <a:latin typeface="Arial"/>
               </a:rPr>
-              <a:t>Want an eighth?</a:t>
+              <a:t>Want a ninth?</a:t>
             </a:r>
           </a:p>
           <a:p>
             <a:pPr algn="l">
               <a:lnSpc>
-                <a:spcPct val="115000"/>
+                <a:spcPct val="112000"/>
               </a:lnSpc>
               <a:spcAft>
                 <a:spcPts val="0"/>
               </a:spcAft>
             </a:pPr>
             <a:r>
-              <a:rPr sz="1200" b="0" i="0">
+              <a:rPr sz="1100" b="0" i="0">
                 <a:solidFill>
                   <a:srgbClr val="1D6B46"/>
                 </a:solidFill>
@@ -10315,7 +10430,7 @@
       </p:sp>
       <p:sp>
         <p:nvSpPr>
-          <p:cNvPr id="22" name="TextBox 21"/>
+          <p:cNvPr id="24" name="TextBox 23"/>
           <p:cNvSpPr txBox="1"/>
           <p:nvPr/>
         </p:nvSpPr>
